--- a/index/designs/y7-l10/l8-review-test-prep/l8-review-test-prep.pptx
+++ b/index/designs/y7-l10/l8-review-test-prep/l8-review-test-prep.pptx
@@ -2726,12 +2726,6 @@
               </a:rPr>
               <a:t>考试</a:t>
             </a:r>
-            <a:pPr algn="ctr" indent="0" marL="0">
-              <a:lnSpc>
-                <a:spcPts val="7920"/>
-              </a:lnSpc>
-              <a:buNone/>
-            </a:pPr>
             <a:r>
               <a:rPr lang="en-US" sz="7200" b="1" dirty="0">
                 <a:solidFill>
@@ -2743,12 +2737,6 @@
               </a:rPr>
               <a:t>大</a:t>
             </a:r>
-            <a:pPr algn="ctr" indent="0" marL="0">
-              <a:lnSpc>
-                <a:spcPts val="7920"/>
-              </a:lnSpc>
-              <a:buNone/>
-            </a:pPr>
             <a:r>
               <a:rPr lang="en-US" sz="7200" dirty="0">
                 <a:solidFill>
@@ -20466,9 +20454,6 @@
               </a:rPr>
               <a:t>On your paper, write down </a:t>
             </a:r>
-            <a:pPr algn="l" indent="0" marL="0">
-              <a:buNone/>
-            </a:pPr>
             <a:r>
               <a:rPr lang="en-US" sz="1100" b="1" dirty="0">
                 <a:solidFill>
@@ -20480,9 +20465,6 @@
               </a:rPr>
               <a:t>one thing you're most confident</a:t>
             </a:r>
-            <a:pPr algn="l" indent="0" marL="0">
-              <a:buNone/>
-            </a:pPr>
             <a:r>
               <a:rPr lang="en-US" sz="1100" dirty="0">
                 <a:solidFill>
@@ -20494,9 +20476,6 @@
               </a:rPr>
               <a:t> about for the test, and </a:t>
             </a:r>
-            <a:pPr algn="l" indent="0" marL="0">
-              <a:buNone/>
-            </a:pPr>
             <a:r>
               <a:rPr lang="en-US" sz="1100" b="1" dirty="0">
                 <a:solidFill>
@@ -20508,9 +20487,6 @@
               </a:rPr>
               <a:t>one thing you want to review</a:t>
             </a:r>
-            <a:pPr algn="l" indent="0" marL="0">
-              <a:buNone/>
-            </a:pPr>
             <a:r>
               <a:rPr lang="en-US" sz="1100" dirty="0">
                 <a:solidFill>
@@ -22897,9 +22873,6 @@
               </a:rPr>
               <a:t>Translate </a:t>
             </a:r>
-            <a:pPr algn="l" indent="0" marL="0">
-              <a:buNone/>
-            </a:pPr>
             <a:r>
               <a:rPr lang="en-US" sz="1000" b="1" dirty="0">
                 <a:solidFill>
@@ -22911,9 +22884,6 @@
               </a:rPr>
               <a:t>any time</a:t>
             </a:r>
-            <a:pPr algn="l" indent="0" marL="0">
-              <a:buNone/>
-            </a:pPr>
             <a:r>
               <a:rPr lang="en-US" sz="1000" dirty="0">
                 <a:solidFill>
@@ -23037,9 +23007,6 @@
               </a:rPr>
               <a:t>Identify and </a:t>
             </a:r>
-            <a:pPr algn="l" indent="0" marL="0">
-              <a:buNone/>
-            </a:pPr>
             <a:r>
               <a:rPr lang="en-US" sz="1000" b="1" dirty="0">
                 <a:solidFill>
@@ -23051,9 +23018,6 @@
               </a:rPr>
               <a:t>correct common mistakes</a:t>
             </a:r>
-            <a:pPr algn="l" indent="0" marL="0">
-              <a:buNone/>
-            </a:pPr>
             <a:r>
               <a:rPr lang="en-US" sz="1000" dirty="0">
                 <a:solidFill>
@@ -23177,9 +23141,6 @@
               </a:rPr>
               <a:t>Feel </a:t>
             </a:r>
-            <a:pPr algn="l" indent="0" marL="0">
-              <a:buNone/>
-            </a:pPr>
             <a:r>
               <a:rPr lang="en-US" sz="1000" b="1" dirty="0">
                 <a:solidFill>
@@ -23191,9 +23152,6 @@
               </a:rPr>
               <a:t>confident and ready</a:t>
             </a:r>
-            <a:pPr algn="l" indent="0" marL="0">
-              <a:buNone/>
-            </a:pPr>
             <a:r>
               <a:rPr lang="en-US" sz="1000" dirty="0">
                 <a:solidFill>
